--- a/public/fun/pack/pptx/talkpro/발표템플릿프리미엄_14_모임·동호회소개_네이비샴페인.pptx
+++ b/public/fun/pack/pptx/talkpro/발표템플릿프리미엄_14_모임·동호회소개_네이비샴페인.pptx
@@ -115,12 +115,12 @@
   <p:extLst>
     <p:ext uri="{521415D9-36F7-43E2-AB2F-B90AF26B5E84}">
       <p14:sectionLst xmlns:p14="http://schemas.microsoft.com/office/powerpoint/2010/main">
-        <p14:section name="시작" id="{A4454C47-9C6B-413F-9426-36A6FBD431D5}">
+        <p14:section name="시작" id="{4B0598EC-3DD2-4760-B88C-904E87498DE9}">
           <p14:sldIdLst>
             <p14:sldId id="256"/>
           </p14:sldIdLst>
         </p14:section>
-        <p14:section name="본문" id="{DC4D5B70-77D7-4343-A368-2915D75D10CB}">
+        <p14:section name="본문" id="{5B490D9B-43EB-4050-B8BE-A36CE9F6478B}">
           <p14:sldIdLst>
             <p14:sldId id="257"/>
             <p14:sldId id="258"/>
@@ -131,7 +131,7 @@
             <p14:sldId id="263"/>
           </p14:sldIdLst>
         </p14:section>
-        <p14:section name="마무리" id="{A6BF71ED-9A67-4484-A068-30D774693D50}">
+        <p14:section name="마무리" id="{C32D1308-27D6-46E8-B66A-866EA37826BF}">
           <p14:sldIdLst>
             <p14:sldId id="264"/>
           </p14:sldIdLst>
@@ -1919,7 +1919,7 @@
             </a:lvl1pPr>
           </a:lstStyle>
           <a:p>
-            <a:fld id="{B03665FD-A62C-4B78-A9C1-B77607A330DD}" type="slidenum">
+            <a:fld id="{A992D430-3033-48A1-AD93-47C6B00A9F45}" type="slidenum">
               <a:rPr lang="en-US"/>
               <a:t>‹#›</a:t>
             </a:fld>
@@ -2637,7 +2637,7 @@
             </a:lvl1pPr>
           </a:lstStyle>
           <a:p>
-            <a:fld id="{8BFAF98B-9D1B-4EB0-A9B9-7AB2287EC7AB}" type="slidenum">
+            <a:fld id="{45F3C2C7-8015-438F-B8F0-71783E069CB1}" type="slidenum">
               <a:rPr lang="en-US"/>
               <a:t>‹#›</a:t>
             </a:fld>
@@ -3321,7 +3321,7 @@
             </a:lvl1pPr>
           </a:lstStyle>
           <a:p>
-            <a:fld id="{4CC74F2E-E07C-4BDE-9760-F1C3A885FFCB}" type="slidenum">
+            <a:fld id="{4F70B1F2-D2E0-421E-B466-AB6089BE7D85}" type="slidenum">
               <a:rPr lang="en-US"/>
               <a:t>‹#›</a:t>
             </a:fld>
@@ -4172,7 +4172,7 @@
           <a:p>
             <a:r>
               <a:rPr lang="ko-KR"/>
-              <a:t>0000. 00. 00</a:t>
+              <a:t>날짜 입력</a:t>
             </a:r>
           </a:p>
         </p:txBody>
@@ -4257,7 +4257,7 @@
           <a:bodyPr/>
           <a:lstStyle/>
           <a:p>
-            <a:fld id="{3F6D3EA6-E7E8-4C85-AD90-CBB1C6A50D70}" type="slidenum">
+            <a:fld id="{A5FF8A9C-B729-4476-81CF-50EDB28A606C}" type="slidenum">
               <a:rPr lang="en-US"/>
               <a:t>‹#›</a:t>
             </a:fld>
@@ -5531,7 +5531,7 @@
           <a:bodyPr/>
           <a:lstStyle/>
           <a:p>
-            <a:fld id="{A0AA2C8F-F1F1-4F1B-8BBC-0DB3B86AACA4}" type="slidenum">
+            <a:fld id="{DB877BF1-8333-41D7-AEE2-6737527A4BEB}" type="slidenum">
               <a:rPr lang="en-US"/>
               <a:t>‹#›</a:t>
             </a:fld>
@@ -5619,7 +5619,7 @@
           <a:bodyPr/>
           <a:lstStyle/>
           <a:p>
-            <a:fld id="{22BC9929-433C-4541-9223-F09ED48E557E}" type="slidenum">
+            <a:fld id="{C1722DC2-501C-43C1-96B4-F2B613F23783}" type="slidenum">
               <a:rPr lang="en-US"/>
               <a:t>‹#›</a:t>
             </a:fld>
@@ -6646,7 +6646,7 @@
           <a:bodyPr/>
           <a:lstStyle/>
           <a:p>
-            <a:fld id="{B2459EC6-90D4-47B3-8316-526CEAC16E37}" type="slidenum">
+            <a:fld id="{C4E0E2EA-D37E-4B19-93E0-CF2278745317}" type="slidenum">
               <a:rPr lang="en-US"/>
               <a:t>‹#›</a:t>
             </a:fld>
@@ -7298,7 +7298,7 @@
           <a:bodyPr/>
           <a:lstStyle/>
           <a:p>
-            <a:fld id="{EC3EAAB4-616B-4FC3-B6C1-BBC444E064CB}" type="slidenum">
+            <a:fld id="{B14CFCC5-EFEE-4755-954A-42B6D1A99FBC}" type="slidenum">
               <a:rPr lang="en-US"/>
               <a:t>‹#›</a:t>
             </a:fld>
@@ -7478,7 +7478,7 @@
           <a:bodyPr/>
           <a:lstStyle/>
           <a:p>
-            <a:fld id="{D71F68B1-AC2E-41F7-A772-9FB6F150B427}" type="slidenum">
+            <a:fld id="{6971BDE1-F2B8-407B-BED7-BE66E195E964}" type="slidenum">
               <a:rPr lang="en-US"/>
               <a:t>‹#›</a:t>
             </a:fld>
@@ -8542,7 +8542,7 @@
           <a:bodyPr/>
           <a:lstStyle/>
           <a:p>
-            <a:fld id="{0526C5B1-5801-4371-8A06-2B36270116F5}" type="slidenum">
+            <a:fld id="{63378017-E5D5-4AC8-9A96-61928B280EA4}" type="slidenum">
               <a:rPr lang="en-US"/>
               <a:t>‹#›</a:t>
             </a:fld>
